--- a/_wp移行素材/★引継ぎ資料/★山口様向け_検索で見つけてもらう記事の書き方.pptx
+++ b/_wp移行素材/★引継ぎ資料/★山口様向け_検索で見つけてもらう記事の書き方.pptx
@@ -3834,7 +3834,7 @@
                 <a:ea typeface="Meiryo" pitchFamily="34" charset="-122"/>
                 <a:cs typeface="Meiryo" pitchFamily="34" charset="-120"/>
               </a:rPr>
-              <a:t>パーキンソン病／すくみ足／立ち上がり／震え／脳卒中</a:t>
+              <a:t>パーキンソン病／すくみ足／立ち上がり／震え／姿勢の傾き</a:t>
             </a:r>
             <a:endParaRPr lang="en-US" sz="1500" dirty="0"/>
           </a:p>

--- a/_wp移行素材/★引継ぎ資料/★山口様向け_検索で見つけてもらう記事の書き方.pptx
+++ b/_wp移行素材/★引継ぎ資料/★山口様向け_検索で見つけてもらう記事の書き方.pptx
@@ -1658,7 +1658,7 @@
     <p:bg>
       <p:bgPr>
         <a:solidFill>
-          <a:srgbClr val="264653"/>
+          <a:srgbClr val="F4E9D8"/>
         </a:solidFill>
       </p:bgPr>
     </p:bg>
@@ -1678,14 +1678,117 @@
       </p:grpSpPr>
       <p:sp>
         <p:nvSpPr>
-          <p:cNvPr id="2" name="Text 0"/>
-          <p:cNvSpPr/>
-          <p:nvPr/>
-        </p:nvSpPr>
-        <p:spPr>
-          <a:xfrm>
-            <a:off x="914400" y="1828800"/>
-            <a:ext cx="10332720" cy="1463040"/>
+          <p:cNvPr id="2" name="Shape 0"/>
+          <p:cNvSpPr/>
+          <p:nvPr/>
+        </p:nvSpPr>
+        <p:spPr>
+          <a:xfrm>
+            <a:off x="0" y="0"/>
+            <a:ext cx="12198096" cy="146304"/>
+          </a:xfrm>
+          <a:prstGeom prst="rect">
+            <a:avLst/>
+          </a:prstGeom>
+          <a:solidFill>
+            <a:srgbClr val="264653"/>
+          </a:solidFill>
+          <a:ln/>
+        </p:spPr>
+      </p:sp>
+      <p:sp>
+        <p:nvSpPr>
+          <p:cNvPr id="3" name="Shape 1"/>
+          <p:cNvSpPr/>
+          <p:nvPr/>
+        </p:nvSpPr>
+        <p:spPr>
+          <a:xfrm>
+            <a:off x="0" y="6711696"/>
+            <a:ext cx="12198096" cy="146304"/>
+          </a:xfrm>
+          <a:prstGeom prst="rect">
+            <a:avLst/>
+          </a:prstGeom>
+          <a:solidFill>
+            <a:srgbClr val="F4A261"/>
+          </a:solidFill>
+          <a:ln/>
+        </p:spPr>
+      </p:sp>
+      <p:pic>
+        <p:nvPicPr>
+          <p:cNvPr id="4" name="Image 0" descr="/sessions/compassionate-sweet-heisenberg/mnt/dev-aspath-life-main/tools/assets/logo-deck.png">    </p:cNvPr>
+          <p:cNvPicPr>
+            <a:picLocks noChangeAspect="1"/>
+          </p:cNvPicPr>
+          <p:nvPr/>
+        </p:nvPicPr>
+        <p:blipFill>
+          <a:blip r:embed="rId1"/>
+          <a:stretch>
+            <a:fillRect/>
+          </a:stretch>
+        </p:blipFill>
+        <p:spPr>
+          <a:xfrm>
+            <a:off x="1051560" y="1874520"/>
+            <a:ext cx="2320246" cy="2834640"/>
+          </a:xfrm>
+          <a:prstGeom prst="rect">
+            <a:avLst/>
+          </a:prstGeom>
+        </p:spPr>
+      </p:pic>
+      <p:sp>
+        <p:nvSpPr>
+          <p:cNvPr id="5" name="Text 2"/>
+          <p:cNvSpPr txBox="1"/>
+          <p:nvPr/>
+        </p:nvSpPr>
+        <p:spPr>
+          <a:xfrm>
+            <a:off x="4892040" y="1572768"/>
+            <a:ext cx="6675120" cy="384048"/>
+          </a:xfrm>
+          <a:prstGeom prst="rect">
+            <a:avLst/>
+          </a:prstGeom>
+          <a:noFill/>
+          <a:ln/>
+        </p:spPr>
+        <p:txBody>
+          <a:bodyPr wrap="square" lIns="0" tIns="0" rIns="0" bIns="0" rtlCol="0" anchor="ctr"/>
+          <a:lstStyle/>
+          <a:p>
+            <a:pPr indent="0" marL="0">
+              <a:buNone/>
+            </a:pPr>
+            <a:r>
+              <a:rPr lang="en-US" sz="1500" b="1" spc="600" kern="0" dirty="0">
+                <a:solidFill>
+                  <a:srgbClr val="F4A261"/>
+                </a:solidFill>
+                <a:latin typeface="Meiryo" pitchFamily="34" charset="0"/>
+                <a:ea typeface="Meiryo" pitchFamily="34" charset="-122"/>
+                <a:cs typeface="Meiryo" pitchFamily="34" charset="-120"/>
+              </a:rPr>
+              <a:t>ASPATH</a:t>
+            </a:r>
+            <a:endParaRPr lang="en-US" sz="1500" dirty="0"/>
+          </a:p>
+        </p:txBody>
+      </p:sp>
+      <p:sp>
+        <p:nvSpPr>
+          <p:cNvPr id="6" name="Text 3"/>
+          <p:cNvSpPr txBox="1"/>
+          <p:nvPr/>
+        </p:nvSpPr>
+        <p:spPr>
+          <a:xfrm>
+            <a:off x="4892040" y="1874520"/>
+            <a:ext cx="6675120" cy="1197864"/>
           </a:xfrm>
           <a:prstGeom prst="rect">
             <a:avLst/>
@@ -1699,14 +1802,14 @@
           <a:p>
             <a:pPr indent="0" marL="0">
               <a:lnSpc>
-                <a:spcPts val="5800"/>
+                <a:spcPct val="120000"/>
               </a:lnSpc>
               <a:buNone/>
             </a:pPr>
             <a:r>
-              <a:rPr lang="en-US" sz="4200" b="1" dirty="0">
-                <a:solidFill>
-                  <a:srgbClr val="FFFFFF"/>
+              <a:rPr lang="en-US" sz="3300" b="1" dirty="0">
+                <a:solidFill>
+                  <a:srgbClr val="264653"/>
                 </a:solidFill>
                 <a:latin typeface="Meiryo" pitchFamily="34" charset="0"/>
                 <a:ea typeface="Meiryo" pitchFamily="34" charset="-122"/>
@@ -1714,19 +1817,19 @@
               </a:rPr>
               <a:t>検索で見つけてもらう</a:t>
             </a:r>
-            <a:endParaRPr lang="en-US" sz="4200" dirty="0"/>
+            <a:endParaRPr lang="en-US" sz="3300" dirty="0"/>
           </a:p>
           <a:p>
             <a:pPr indent="0" marL="0">
               <a:lnSpc>
-                <a:spcPts val="5800"/>
+                <a:spcPct val="120000"/>
               </a:lnSpc>
               <a:buNone/>
             </a:pPr>
             <a:r>
-              <a:rPr lang="en-US" sz="4200" b="1" dirty="0">
-                <a:solidFill>
-                  <a:srgbClr val="FFFFFF"/>
+              <a:rPr lang="en-US" sz="3300" b="1" dirty="0">
+                <a:solidFill>
+                  <a:srgbClr val="264653"/>
                 </a:solidFill>
                 <a:latin typeface="Meiryo" pitchFamily="34" charset="0"/>
                 <a:ea typeface="Meiryo" pitchFamily="34" charset="-122"/>
@@ -1734,81 +1837,20 @@
               </a:rPr>
               <a:t>記事の書き方</a:t>
             </a:r>
-            <a:endParaRPr lang="en-US" sz="4200" dirty="0"/>
-          </a:p>
-        </p:txBody>
-      </p:sp>
-      <p:sp>
-        <p:nvSpPr>
-          <p:cNvPr id="3" name="Text 1"/>
-          <p:cNvSpPr/>
-          <p:nvPr/>
-        </p:nvSpPr>
-        <p:spPr>
-          <a:xfrm>
-            <a:off x="960120" y="3520440"/>
-            <a:ext cx="10058400" cy="457200"/>
-          </a:xfrm>
-          <a:prstGeom prst="rect">
-            <a:avLst/>
-          </a:prstGeom>
-          <a:noFill/>
-          <a:ln/>
-        </p:spPr>
-        <p:txBody>
-          <a:bodyPr wrap="square" lIns="0" tIns="0" rIns="0" bIns="0" rtlCol="0" anchor="ctr"/>
-          <a:lstStyle/>
-          <a:p>
-            <a:pPr indent="0" marL="0">
-              <a:buNone/>
-            </a:pPr>
-            <a:r>
-              <a:rPr lang="en-US" sz="2000" dirty="0">
-                <a:solidFill>
-                  <a:srgbClr val="F4A261"/>
-                </a:solidFill>
-                <a:latin typeface="Meiryo" pitchFamily="34" charset="0"/>
-                <a:ea typeface="Meiryo" pitchFamily="34" charset="-122"/>
-                <a:cs typeface="Meiryo" pitchFamily="34" charset="-120"/>
-              </a:rPr>
-              <a:t>山口様へ　／　2026年8月</a:t>
-            </a:r>
-            <a:endParaRPr lang="en-US" sz="2000" dirty="0"/>
-          </a:p>
-        </p:txBody>
-      </p:sp>
-      <p:sp>
-        <p:nvSpPr>
-          <p:cNvPr id="4" name="Shape 2"/>
-          <p:cNvSpPr/>
-          <p:nvPr/>
-        </p:nvSpPr>
-        <p:spPr>
-          <a:xfrm>
-            <a:off x="914400" y="4251960"/>
-            <a:ext cx="7498080" cy="1463040"/>
-          </a:xfrm>
-          <a:prstGeom prst="roundRect">
-            <a:avLst>
-              <a:gd name="adj" fmla="val 7500"/>
-            </a:avLst>
-          </a:prstGeom>
-          <a:solidFill>
-            <a:srgbClr val="32596B"/>
-          </a:solidFill>
-          <a:ln/>
-        </p:spPr>
-      </p:sp>
-      <p:sp>
-        <p:nvSpPr>
-          <p:cNvPr id="5" name="Text 3"/>
-          <p:cNvSpPr/>
-          <p:nvPr/>
-        </p:nvSpPr>
-        <p:spPr>
-          <a:xfrm>
-            <a:off x="1188720" y="4572000"/>
-            <a:ext cx="7040880" cy="914400"/>
+            <a:endParaRPr lang="en-US" sz="3300" dirty="0"/>
+          </a:p>
+        </p:txBody>
+      </p:sp>
+      <p:sp>
+        <p:nvSpPr>
+          <p:cNvPr id="7" name="Text 4"/>
+          <p:cNvSpPr txBox="1"/>
+          <p:nvPr/>
+        </p:nvSpPr>
+        <p:spPr>
+          <a:xfrm>
+            <a:off x="4892040" y="3200400"/>
+            <a:ext cx="6675120" cy="548640"/>
           </a:xfrm>
           <a:prstGeom prst="rect">
             <a:avLst/>
@@ -1822,42 +1864,179 @@
           <a:p>
             <a:pPr indent="0" marL="0">
               <a:lnSpc>
-                <a:spcPts val="2800"/>
+                <a:spcPct val="130000"/>
               </a:lnSpc>
               <a:buNone/>
             </a:pPr>
             <a:r>
-              <a:rPr lang="en-US" sz="1700" dirty="0">
-                <a:solidFill>
-                  <a:srgbClr val="DCE7EA"/>
-                </a:solidFill>
-                <a:latin typeface="Meiryo" pitchFamily="34" charset="0"/>
-                <a:ea typeface="Meiryo" pitchFamily="34" charset="-122"/>
-                <a:cs typeface="Meiryo" pitchFamily="34" charset="-120"/>
-              </a:rPr>
-              <a:t>サイトの土台づくりは済んでいます。</a:t>
-            </a:r>
-            <a:endParaRPr lang="en-US" sz="1700" dirty="0"/>
+              <a:rPr lang="en-US" sz="1500" dirty="0">
+                <a:solidFill>
+                  <a:srgbClr val="52707A"/>
+                </a:solidFill>
+                <a:latin typeface="Meiryo" pitchFamily="34" charset="0"/>
+                <a:ea typeface="Meiryo" pitchFamily="34" charset="-122"/>
+                <a:cs typeface="Meiryo" pitchFamily="34" charset="-120"/>
+              </a:rPr>
+              <a:t>山口様へ</a:t>
+            </a:r>
+            <a:endParaRPr lang="en-US" sz="1500" dirty="0"/>
           </a:p>
           <a:p>
             <a:pPr indent="0" marL="0">
               <a:lnSpc>
-                <a:spcPts val="2800"/>
+                <a:spcPct val="130000"/>
               </a:lnSpc>
               <a:buNone/>
             </a:pPr>
             <a:r>
-              <a:rPr lang="en-US" sz="1700" dirty="0">
-                <a:solidFill>
-                  <a:srgbClr val="DCE7EA"/>
-                </a:solidFill>
-                <a:latin typeface="Meiryo" pitchFamily="34" charset="0"/>
-                <a:ea typeface="Meiryo" pitchFamily="34" charset="-122"/>
-                <a:cs typeface="Meiryo" pitchFamily="34" charset="-120"/>
-              </a:rPr>
-              <a:t>ここから先は「どんな記事を書くか」で決まります。</a:t>
-            </a:r>
-            <a:endParaRPr lang="en-US" sz="1700" dirty="0"/>
+              <a:rPr lang="en-US" sz="1500" dirty="0">
+                <a:solidFill>
+                  <a:srgbClr val="52707A"/>
+                </a:solidFill>
+                <a:latin typeface="Meiryo" pitchFamily="34" charset="0"/>
+                <a:ea typeface="Meiryo" pitchFamily="34" charset="-122"/>
+                <a:cs typeface="Meiryo" pitchFamily="34" charset="-120"/>
+              </a:rPr>
+              <a:t>サイトの土台づくりは済んでいます。ここから先は「どんな記事を書くか」で決まります。</a:t>
+            </a:r>
+            <a:endParaRPr lang="en-US" sz="1500" dirty="0"/>
+          </a:p>
+        </p:txBody>
+      </p:sp>
+      <p:sp>
+        <p:nvSpPr>
+          <p:cNvPr id="8" name="Shape 5"/>
+          <p:cNvSpPr/>
+          <p:nvPr/>
+        </p:nvSpPr>
+        <p:spPr>
+          <a:xfrm>
+            <a:off x="4892040" y="4736592"/>
+            <a:ext cx="1828800" cy="18288"/>
+          </a:xfrm>
+          <a:prstGeom prst="rect">
+            <a:avLst/>
+          </a:prstGeom>
+          <a:solidFill>
+            <a:srgbClr val="F4A261"/>
+          </a:solidFill>
+          <a:ln/>
+        </p:spPr>
+      </p:sp>
+      <p:sp>
+        <p:nvSpPr>
+          <p:cNvPr id="9" name="Text 6"/>
+          <p:cNvSpPr txBox="1"/>
+          <p:nvPr/>
+        </p:nvSpPr>
+        <p:spPr>
+          <a:xfrm>
+            <a:off x="4892040" y="4864608"/>
+            <a:ext cx="6675120" cy="292608"/>
+          </a:xfrm>
+          <a:prstGeom prst="rect">
+            <a:avLst/>
+          </a:prstGeom>
+          <a:noFill/>
+          <a:ln/>
+        </p:spPr>
+        <p:txBody>
+          <a:bodyPr wrap="square" lIns="0" tIns="0" rIns="0" bIns="0" rtlCol="0" anchor="ctr"/>
+          <a:lstStyle/>
+          <a:p>
+            <a:pPr indent="0" marL="0">
+              <a:buNone/>
+            </a:pPr>
+            <a:r>
+              <a:rPr lang="en-US" sz="1250" b="1" dirty="0">
+                <a:solidFill>
+                  <a:srgbClr val="264653"/>
+                </a:solidFill>
+                <a:latin typeface="Meiryo" pitchFamily="34" charset="0"/>
+                <a:ea typeface="Meiryo" pitchFamily="34" charset="-122"/>
+                <a:cs typeface="Meiryo" pitchFamily="34" charset="-120"/>
+              </a:rPr>
+              <a:t>鹿児島のパーキンソン病専門トレーニングスタジオ</a:t>
+            </a:r>
+            <a:endParaRPr lang="en-US" sz="1250" dirty="0"/>
+          </a:p>
+        </p:txBody>
+      </p:sp>
+      <p:sp>
+        <p:nvSpPr>
+          <p:cNvPr id="10" name="Text 7"/>
+          <p:cNvSpPr txBox="1"/>
+          <p:nvPr/>
+        </p:nvSpPr>
+        <p:spPr>
+          <a:xfrm>
+            <a:off x="4892040" y="5193792"/>
+            <a:ext cx="6675120" cy="274320"/>
+          </a:xfrm>
+          <a:prstGeom prst="rect">
+            <a:avLst/>
+          </a:prstGeom>
+          <a:noFill/>
+          <a:ln/>
+        </p:spPr>
+        <p:txBody>
+          <a:bodyPr wrap="square" lIns="0" tIns="0" rIns="0" bIns="0" rtlCol="0" anchor="ctr"/>
+          <a:lstStyle/>
+          <a:p>
+            <a:pPr indent="0" marL="0">
+              <a:buNone/>
+            </a:pPr>
+            <a:r>
+              <a:rPr lang="en-US" sz="1150" dirty="0">
+                <a:solidFill>
+                  <a:srgbClr val="52707A"/>
+                </a:solidFill>
+                <a:latin typeface="Meiryo" pitchFamily="34" charset="0"/>
+                <a:ea typeface="Meiryo" pitchFamily="34" charset="-122"/>
+                <a:cs typeface="Meiryo" pitchFamily="34" charset="-120"/>
+              </a:rPr>
+              <a:t>動くことを楽しむ。明日につながる。</a:t>
+            </a:r>
+            <a:endParaRPr lang="en-US" sz="1150" dirty="0"/>
+          </a:p>
+        </p:txBody>
+      </p:sp>
+      <p:sp>
+        <p:nvSpPr>
+          <p:cNvPr id="11" name="Text 8"/>
+          <p:cNvSpPr txBox="1"/>
+          <p:nvPr/>
+        </p:nvSpPr>
+        <p:spPr>
+          <a:xfrm>
+            <a:off x="4892040" y="5596128"/>
+            <a:ext cx="6675120" cy="274320"/>
+          </a:xfrm>
+          <a:prstGeom prst="rect">
+            <a:avLst/>
+          </a:prstGeom>
+          <a:noFill/>
+          <a:ln/>
+        </p:spPr>
+        <p:txBody>
+          <a:bodyPr wrap="square" lIns="0" tIns="0" rIns="0" bIns="0" rtlCol="0" anchor="ctr"/>
+          <a:lstStyle/>
+          <a:p>
+            <a:pPr indent="0" marL="0">
+              <a:buNone/>
+            </a:pPr>
+            <a:r>
+              <a:rPr lang="en-US" sz="1050" dirty="0">
+                <a:solidFill>
+                  <a:srgbClr val="8A9CA2"/>
+                </a:solidFill>
+                <a:latin typeface="Meiryo" pitchFamily="34" charset="0"/>
+                <a:ea typeface="Meiryo" pitchFamily="34" charset="-122"/>
+                <a:cs typeface="Meiryo" pitchFamily="34" charset="-120"/>
+              </a:rPr>
+              <a:t>aspath-life.com　／　2026年8月　ASPATH 様　ご納品資料</a:t>
+            </a:r>
+            <a:endParaRPr lang="en-US" sz="1050" dirty="0"/>
           </a:p>
         </p:txBody>
       </p:sp>
@@ -1893,9 +2072,72 @@
           <a:chExt cx="0" cy="0"/>
         </a:xfrm>
       </p:grpSpPr>
-      <p:sp>
-        <p:nvSpPr>
-          <p:cNvPr id="2" name="Text 0"/>
+      <p:pic>
+        <p:nvPicPr>
+          <p:cNvPr id="2" name="Image 0" descr="/sessions/compassionate-sweet-heisenberg/mnt/dev-aspath-life-main/tools/assets/logo-deck.png">    </p:cNvPr>
+          <p:cNvPicPr>
+            <a:picLocks noChangeAspect="1"/>
+          </p:cNvPicPr>
+          <p:nvPr/>
+        </p:nvPicPr>
+        <p:blipFill>
+          <a:blip r:embed="rId1"/>
+          <a:stretch>
+            <a:fillRect/>
+          </a:stretch>
+        </p:blipFill>
+        <p:spPr>
+          <a:xfrm>
+            <a:off x="11458173" y="109728"/>
+            <a:ext cx="209571" cy="256032"/>
+          </a:xfrm>
+          <a:prstGeom prst="rect">
+            <a:avLst/>
+          </a:prstGeom>
+        </p:spPr>
+      </p:pic>
+      <p:sp>
+        <p:nvSpPr>
+          <p:cNvPr id="3" name="Text 0"/>
+          <p:cNvSpPr txBox="1"/>
+          <p:nvPr/>
+        </p:nvSpPr>
+        <p:spPr>
+          <a:xfrm>
+            <a:off x="8623533" y="128016"/>
+            <a:ext cx="2743200" cy="237744"/>
+          </a:xfrm>
+          <a:prstGeom prst="rect">
+            <a:avLst/>
+          </a:prstGeom>
+          <a:noFill/>
+          <a:ln/>
+        </p:spPr>
+        <p:txBody>
+          <a:bodyPr wrap="square" lIns="0" tIns="0" rIns="0" bIns="0" rtlCol="0" anchor="ctr"/>
+          <a:lstStyle/>
+          <a:p>
+            <a:pPr algn="r" indent="0" marL="0">
+              <a:buNone/>
+            </a:pPr>
+            <a:r>
+              <a:rPr lang="en-US" sz="750" dirty="0">
+                <a:solidFill>
+                  <a:srgbClr val="97A9AF"/>
+                </a:solidFill>
+                <a:latin typeface="Meiryo" pitchFamily="34" charset="0"/>
+                <a:ea typeface="Meiryo" pitchFamily="34" charset="-122"/>
+                <a:cs typeface="Meiryo" pitchFamily="34" charset="-120"/>
+              </a:rPr>
+              <a:t>鹿児島のパーキンソン病専門トレーニングスタジオ</a:t>
+            </a:r>
+            <a:endParaRPr lang="en-US" sz="750" dirty="0"/>
+          </a:p>
+        </p:txBody>
+      </p:sp>
+      <p:sp>
+        <p:nvSpPr>
+          <p:cNvPr id="4" name="Text 1"/>
           <p:cNvSpPr/>
           <p:nvPr/>
         </p:nvSpPr>
@@ -1934,7 +2176,7 @@
       </p:sp>
       <p:sp>
         <p:nvSpPr>
-          <p:cNvPr id="3" name="Text 1"/>
+          <p:cNvPr id="5" name="Text 2"/>
           <p:cNvSpPr/>
           <p:nvPr/>
         </p:nvSpPr>
@@ -1973,7 +2215,7 @@
       </p:sp>
       <p:sp>
         <p:nvSpPr>
-          <p:cNvPr id="4" name="Text 2"/>
+          <p:cNvPr id="6" name="Text 3"/>
           <p:cNvSpPr/>
           <p:nvPr/>
         </p:nvSpPr>
@@ -2012,7 +2254,7 @@
       </p:sp>
       <p:sp>
         <p:nvSpPr>
-          <p:cNvPr id="5" name="Shape 3"/>
+          <p:cNvPr id="7" name="Shape 4"/>
           <p:cNvSpPr/>
           <p:nvPr/>
         </p:nvSpPr>
@@ -2034,7 +2276,7 @@
       </p:sp>
       <p:sp>
         <p:nvSpPr>
-          <p:cNvPr id="6" name="Shape 4"/>
+          <p:cNvPr id="8" name="Shape 5"/>
           <p:cNvSpPr/>
           <p:nvPr/>
         </p:nvSpPr>
@@ -2054,7 +2296,7 @@
       </p:sp>
       <p:sp>
         <p:nvSpPr>
-          <p:cNvPr id="7" name="Text 5"/>
+          <p:cNvPr id="9" name="Text 6"/>
           <p:cNvSpPr/>
           <p:nvPr/>
         </p:nvSpPr>
@@ -2093,7 +2335,7 @@
       </p:sp>
       <p:sp>
         <p:nvSpPr>
-          <p:cNvPr id="8" name="Text 6"/>
+          <p:cNvPr id="10" name="Text 7"/>
           <p:cNvSpPr/>
           <p:nvPr/>
         </p:nvSpPr>
@@ -2132,7 +2374,7 @@
       </p:sp>
       <p:sp>
         <p:nvSpPr>
-          <p:cNvPr id="9" name="Text 7"/>
+          <p:cNvPr id="11" name="Text 8"/>
           <p:cNvSpPr/>
           <p:nvPr/>
         </p:nvSpPr>
@@ -2171,7 +2413,7 @@
       </p:sp>
       <p:sp>
         <p:nvSpPr>
-          <p:cNvPr id="10" name="Shape 8"/>
+          <p:cNvPr id="12" name="Shape 9"/>
           <p:cNvSpPr/>
           <p:nvPr/>
         </p:nvSpPr>
@@ -2193,7 +2435,7 @@
       </p:sp>
       <p:sp>
         <p:nvSpPr>
-          <p:cNvPr id="11" name="Shape 9"/>
+          <p:cNvPr id="13" name="Shape 10"/>
           <p:cNvSpPr/>
           <p:nvPr/>
         </p:nvSpPr>
@@ -2213,7 +2455,7 @@
       </p:sp>
       <p:sp>
         <p:nvSpPr>
-          <p:cNvPr id="12" name="Text 10"/>
+          <p:cNvPr id="14" name="Text 11"/>
           <p:cNvSpPr/>
           <p:nvPr/>
         </p:nvSpPr>
@@ -2252,7 +2494,7 @@
       </p:sp>
       <p:sp>
         <p:nvSpPr>
-          <p:cNvPr id="13" name="Text 11"/>
+          <p:cNvPr id="15" name="Text 12"/>
           <p:cNvSpPr/>
           <p:nvPr/>
         </p:nvSpPr>
@@ -2291,7 +2533,7 @@
       </p:sp>
       <p:sp>
         <p:nvSpPr>
-          <p:cNvPr id="14" name="Text 12"/>
+          <p:cNvPr id="16" name="Text 13"/>
           <p:cNvSpPr/>
           <p:nvPr/>
         </p:nvSpPr>
@@ -2330,7 +2572,7 @@
       </p:sp>
       <p:sp>
         <p:nvSpPr>
-          <p:cNvPr id="15" name="Shape 13"/>
+          <p:cNvPr id="17" name="Shape 14"/>
           <p:cNvSpPr/>
           <p:nvPr/>
         </p:nvSpPr>
@@ -2352,7 +2594,7 @@
       </p:sp>
       <p:sp>
         <p:nvSpPr>
-          <p:cNvPr id="16" name="Shape 14"/>
+          <p:cNvPr id="18" name="Shape 15"/>
           <p:cNvSpPr/>
           <p:nvPr/>
         </p:nvSpPr>
@@ -2372,7 +2614,7 @@
       </p:sp>
       <p:sp>
         <p:nvSpPr>
-          <p:cNvPr id="17" name="Text 15"/>
+          <p:cNvPr id="19" name="Text 16"/>
           <p:cNvSpPr/>
           <p:nvPr/>
         </p:nvSpPr>
@@ -2411,7 +2653,7 @@
       </p:sp>
       <p:sp>
         <p:nvSpPr>
-          <p:cNvPr id="18" name="Text 16"/>
+          <p:cNvPr id="20" name="Text 17"/>
           <p:cNvSpPr/>
           <p:nvPr/>
         </p:nvSpPr>
@@ -2450,7 +2692,7 @@
       </p:sp>
       <p:sp>
         <p:nvSpPr>
-          <p:cNvPr id="19" name="Text 17"/>
+          <p:cNvPr id="21" name="Text 18"/>
           <p:cNvSpPr/>
           <p:nvPr/>
         </p:nvSpPr>
@@ -2489,7 +2731,7 @@
       </p:sp>
       <p:sp>
         <p:nvSpPr>
-          <p:cNvPr id="20" name="Shape 18"/>
+          <p:cNvPr id="22" name="Shape 19"/>
           <p:cNvSpPr/>
           <p:nvPr/>
         </p:nvSpPr>
@@ -2511,7 +2753,7 @@
       </p:sp>
       <p:sp>
         <p:nvSpPr>
-          <p:cNvPr id="21" name="Text 19"/>
+          <p:cNvPr id="23" name="Text 20"/>
           <p:cNvSpPr/>
           <p:nvPr/>
         </p:nvSpPr>
@@ -2583,9 +2825,72 @@
           <a:chExt cx="0" cy="0"/>
         </a:xfrm>
       </p:grpSpPr>
-      <p:sp>
-        <p:nvSpPr>
-          <p:cNvPr id="2" name="Text 0"/>
+      <p:pic>
+        <p:nvPicPr>
+          <p:cNvPr id="2" name="Image 0" descr="/sessions/compassionate-sweet-heisenberg/mnt/dev-aspath-life-main/tools/assets/logo-deck.png">    </p:cNvPr>
+          <p:cNvPicPr>
+            <a:picLocks noChangeAspect="1"/>
+          </p:cNvPicPr>
+          <p:nvPr/>
+        </p:nvPicPr>
+        <p:blipFill>
+          <a:blip r:embed="rId1"/>
+          <a:stretch>
+            <a:fillRect/>
+          </a:stretch>
+        </p:blipFill>
+        <p:spPr>
+          <a:xfrm>
+            <a:off x="11458173" y="109728"/>
+            <a:ext cx="209571" cy="256032"/>
+          </a:xfrm>
+          <a:prstGeom prst="rect">
+            <a:avLst/>
+          </a:prstGeom>
+        </p:spPr>
+      </p:pic>
+      <p:sp>
+        <p:nvSpPr>
+          <p:cNvPr id="3" name="Text 0"/>
+          <p:cNvSpPr txBox="1"/>
+          <p:nvPr/>
+        </p:nvSpPr>
+        <p:spPr>
+          <a:xfrm>
+            <a:off x="8623533" y="128016"/>
+            <a:ext cx="2743200" cy="237744"/>
+          </a:xfrm>
+          <a:prstGeom prst="rect">
+            <a:avLst/>
+          </a:prstGeom>
+          <a:noFill/>
+          <a:ln/>
+        </p:spPr>
+        <p:txBody>
+          <a:bodyPr wrap="square" lIns="0" tIns="0" rIns="0" bIns="0" rtlCol="0" anchor="ctr"/>
+          <a:lstStyle/>
+          <a:p>
+            <a:pPr algn="r" indent="0" marL="0">
+              <a:buNone/>
+            </a:pPr>
+            <a:r>
+              <a:rPr lang="en-US" sz="750" dirty="0">
+                <a:solidFill>
+                  <a:srgbClr val="97A9AF"/>
+                </a:solidFill>
+                <a:latin typeface="Meiryo" pitchFamily="34" charset="0"/>
+                <a:ea typeface="Meiryo" pitchFamily="34" charset="-122"/>
+                <a:cs typeface="Meiryo" pitchFamily="34" charset="-120"/>
+              </a:rPr>
+              <a:t>鹿児島のパーキンソン病専門トレーニングスタジオ</a:t>
+            </a:r>
+            <a:endParaRPr lang="en-US" sz="750" dirty="0"/>
+          </a:p>
+        </p:txBody>
+      </p:sp>
+      <p:sp>
+        <p:nvSpPr>
+          <p:cNvPr id="4" name="Text 1"/>
           <p:cNvSpPr/>
           <p:nvPr/>
         </p:nvSpPr>
@@ -2624,7 +2929,7 @@
       </p:sp>
       <p:sp>
         <p:nvSpPr>
-          <p:cNvPr id="3" name="Text 1"/>
+          <p:cNvPr id="5" name="Text 2"/>
           <p:cNvSpPr/>
           <p:nvPr/>
         </p:nvSpPr>
@@ -2663,7 +2968,7 @@
       </p:sp>
       <p:sp>
         <p:nvSpPr>
-          <p:cNvPr id="4" name="Text 2"/>
+          <p:cNvPr id="6" name="Text 3"/>
           <p:cNvSpPr/>
           <p:nvPr/>
         </p:nvSpPr>
@@ -2702,7 +3007,7 @@
       </p:sp>
       <p:sp>
         <p:nvSpPr>
-          <p:cNvPr id="5" name="Shape 3"/>
+          <p:cNvPr id="7" name="Shape 4"/>
           <p:cNvSpPr/>
           <p:nvPr/>
         </p:nvSpPr>
@@ -2724,7 +3029,7 @@
       </p:sp>
       <p:sp>
         <p:nvSpPr>
-          <p:cNvPr id="6" name="Text 4"/>
+          <p:cNvPr id="8" name="Text 5"/>
           <p:cNvSpPr/>
           <p:nvPr/>
         </p:nvSpPr>
@@ -2763,7 +3068,7 @@
       </p:sp>
       <p:sp>
         <p:nvSpPr>
-          <p:cNvPr id="7" name="Text 5"/>
+          <p:cNvPr id="9" name="Text 6"/>
           <p:cNvSpPr/>
           <p:nvPr/>
         </p:nvSpPr>
@@ -2848,7 +3153,7 @@
       </p:sp>
       <p:sp>
         <p:nvSpPr>
-          <p:cNvPr id="8" name="Shape 6"/>
+          <p:cNvPr id="10" name="Shape 7"/>
           <p:cNvSpPr/>
           <p:nvPr/>
         </p:nvSpPr>
@@ -2870,7 +3175,7 @@
       </p:sp>
       <p:sp>
         <p:nvSpPr>
-          <p:cNvPr id="9" name="Text 7"/>
+          <p:cNvPr id="11" name="Text 8"/>
           <p:cNvSpPr/>
           <p:nvPr/>
         </p:nvSpPr>
@@ -2909,7 +3214,7 @@
       </p:sp>
       <p:sp>
         <p:nvSpPr>
-          <p:cNvPr id="10" name="Text 8"/>
+          <p:cNvPr id="12" name="Text 9"/>
           <p:cNvSpPr/>
           <p:nvPr/>
         </p:nvSpPr>
@@ -2994,7 +3299,7 @@
       </p:sp>
       <p:sp>
         <p:nvSpPr>
-          <p:cNvPr id="11" name="Shape 9"/>
+          <p:cNvPr id="13" name="Shape 10"/>
           <p:cNvSpPr/>
           <p:nvPr/>
         </p:nvSpPr>
@@ -3016,7 +3321,7 @@
       </p:sp>
       <p:sp>
         <p:nvSpPr>
-          <p:cNvPr id="12" name="Text 10"/>
+          <p:cNvPr id="14" name="Text 11"/>
           <p:cNvSpPr/>
           <p:nvPr/>
         </p:nvSpPr>
@@ -3128,9 +3433,72 @@
           <a:chExt cx="0" cy="0"/>
         </a:xfrm>
       </p:grpSpPr>
-      <p:sp>
-        <p:nvSpPr>
-          <p:cNvPr id="2" name="Text 0"/>
+      <p:pic>
+        <p:nvPicPr>
+          <p:cNvPr id="2" name="Image 0" descr="/sessions/compassionate-sweet-heisenberg/mnt/dev-aspath-life-main/tools/assets/logo-deck.png">    </p:cNvPr>
+          <p:cNvPicPr>
+            <a:picLocks noChangeAspect="1"/>
+          </p:cNvPicPr>
+          <p:nvPr/>
+        </p:nvPicPr>
+        <p:blipFill>
+          <a:blip r:embed="rId1"/>
+          <a:stretch>
+            <a:fillRect/>
+          </a:stretch>
+        </p:blipFill>
+        <p:spPr>
+          <a:xfrm>
+            <a:off x="11458173" y="109728"/>
+            <a:ext cx="209571" cy="256032"/>
+          </a:xfrm>
+          <a:prstGeom prst="rect">
+            <a:avLst/>
+          </a:prstGeom>
+        </p:spPr>
+      </p:pic>
+      <p:sp>
+        <p:nvSpPr>
+          <p:cNvPr id="3" name="Text 0"/>
+          <p:cNvSpPr txBox="1"/>
+          <p:nvPr/>
+        </p:nvSpPr>
+        <p:spPr>
+          <a:xfrm>
+            <a:off x="8623533" y="128016"/>
+            <a:ext cx="2743200" cy="237744"/>
+          </a:xfrm>
+          <a:prstGeom prst="rect">
+            <a:avLst/>
+          </a:prstGeom>
+          <a:noFill/>
+          <a:ln/>
+        </p:spPr>
+        <p:txBody>
+          <a:bodyPr wrap="square" lIns="0" tIns="0" rIns="0" bIns="0" rtlCol="0" anchor="ctr"/>
+          <a:lstStyle/>
+          <a:p>
+            <a:pPr algn="r" indent="0" marL="0">
+              <a:buNone/>
+            </a:pPr>
+            <a:r>
+              <a:rPr lang="en-US" sz="750" dirty="0">
+                <a:solidFill>
+                  <a:srgbClr val="97A9AF"/>
+                </a:solidFill>
+                <a:latin typeface="Meiryo" pitchFamily="34" charset="0"/>
+                <a:ea typeface="Meiryo" pitchFamily="34" charset="-122"/>
+                <a:cs typeface="Meiryo" pitchFamily="34" charset="-120"/>
+              </a:rPr>
+              <a:t>鹿児島のパーキンソン病専門トレーニングスタジオ</a:t>
+            </a:r>
+            <a:endParaRPr lang="en-US" sz="750" dirty="0"/>
+          </a:p>
+        </p:txBody>
+      </p:sp>
+      <p:sp>
+        <p:nvSpPr>
+          <p:cNvPr id="4" name="Text 1"/>
           <p:cNvSpPr/>
           <p:nvPr/>
         </p:nvSpPr>
@@ -3169,7 +3537,7 @@
       </p:sp>
       <p:sp>
         <p:nvSpPr>
-          <p:cNvPr id="3" name="Text 1"/>
+          <p:cNvPr id="5" name="Text 2"/>
           <p:cNvSpPr/>
           <p:nvPr/>
         </p:nvSpPr>
@@ -3208,7 +3576,7 @@
       </p:sp>
       <p:sp>
         <p:nvSpPr>
-          <p:cNvPr id="4" name="Text 2"/>
+          <p:cNvPr id="6" name="Text 3"/>
           <p:cNvSpPr/>
           <p:nvPr/>
         </p:nvSpPr>
@@ -3247,7 +3615,7 @@
       </p:sp>
       <p:sp>
         <p:nvSpPr>
-          <p:cNvPr id="5" name="Shape 3"/>
+          <p:cNvPr id="7" name="Shape 4"/>
           <p:cNvSpPr/>
           <p:nvPr/>
         </p:nvSpPr>
@@ -3269,7 +3637,7 @@
       </p:sp>
       <p:sp>
         <p:nvSpPr>
-          <p:cNvPr id="6" name="Text 4"/>
+          <p:cNvPr id="8" name="Text 5"/>
           <p:cNvSpPr/>
           <p:nvPr/>
         </p:nvSpPr>
@@ -3308,7 +3676,7 @@
       </p:sp>
       <p:sp>
         <p:nvSpPr>
-          <p:cNvPr id="7" name="Text 5"/>
+          <p:cNvPr id="9" name="Text 6"/>
           <p:cNvSpPr/>
           <p:nvPr/>
         </p:nvSpPr>
@@ -3347,7 +3715,7 @@
       </p:sp>
       <p:sp>
         <p:nvSpPr>
-          <p:cNvPr id="8" name="Shape 6"/>
+          <p:cNvPr id="10" name="Shape 7"/>
           <p:cNvSpPr/>
           <p:nvPr/>
         </p:nvSpPr>
@@ -3369,7 +3737,7 @@
       </p:sp>
       <p:sp>
         <p:nvSpPr>
-          <p:cNvPr id="9" name="Text 7"/>
+          <p:cNvPr id="11" name="Text 8"/>
           <p:cNvSpPr/>
           <p:nvPr/>
         </p:nvSpPr>
@@ -3408,7 +3776,7 @@
       </p:sp>
       <p:sp>
         <p:nvSpPr>
-          <p:cNvPr id="10" name="Text 8"/>
+          <p:cNvPr id="12" name="Text 9"/>
           <p:cNvSpPr/>
           <p:nvPr/>
         </p:nvSpPr>
@@ -3470,7 +3838,7 @@
       </p:sp>
       <p:sp>
         <p:nvSpPr>
-          <p:cNvPr id="11" name="Shape 9"/>
+          <p:cNvPr id="13" name="Shape 10"/>
           <p:cNvSpPr/>
           <p:nvPr/>
         </p:nvSpPr>
@@ -3492,7 +3860,7 @@
       </p:sp>
       <p:sp>
         <p:nvSpPr>
-          <p:cNvPr id="12" name="Text 10"/>
+          <p:cNvPr id="14" name="Text 11"/>
           <p:cNvSpPr/>
           <p:nvPr/>
         </p:nvSpPr>
@@ -3564,9 +3932,72 @@
           <a:chExt cx="0" cy="0"/>
         </a:xfrm>
       </p:grpSpPr>
-      <p:sp>
-        <p:nvSpPr>
-          <p:cNvPr id="2" name="Text 0"/>
+      <p:pic>
+        <p:nvPicPr>
+          <p:cNvPr id="2" name="Image 0" descr="/sessions/compassionate-sweet-heisenberg/mnt/dev-aspath-life-main/tools/assets/logo-deck.png">    </p:cNvPr>
+          <p:cNvPicPr>
+            <a:picLocks noChangeAspect="1"/>
+          </p:cNvPicPr>
+          <p:nvPr/>
+        </p:nvPicPr>
+        <p:blipFill>
+          <a:blip r:embed="rId1"/>
+          <a:stretch>
+            <a:fillRect/>
+          </a:stretch>
+        </p:blipFill>
+        <p:spPr>
+          <a:xfrm>
+            <a:off x="11458173" y="109728"/>
+            <a:ext cx="209571" cy="256032"/>
+          </a:xfrm>
+          <a:prstGeom prst="rect">
+            <a:avLst/>
+          </a:prstGeom>
+        </p:spPr>
+      </p:pic>
+      <p:sp>
+        <p:nvSpPr>
+          <p:cNvPr id="3" name="Text 0"/>
+          <p:cNvSpPr txBox="1"/>
+          <p:nvPr/>
+        </p:nvSpPr>
+        <p:spPr>
+          <a:xfrm>
+            <a:off x="8623533" y="128016"/>
+            <a:ext cx="2743200" cy="237744"/>
+          </a:xfrm>
+          <a:prstGeom prst="rect">
+            <a:avLst/>
+          </a:prstGeom>
+          <a:noFill/>
+          <a:ln/>
+        </p:spPr>
+        <p:txBody>
+          <a:bodyPr wrap="square" lIns="0" tIns="0" rIns="0" bIns="0" rtlCol="0" anchor="ctr"/>
+          <a:lstStyle/>
+          <a:p>
+            <a:pPr algn="r" indent="0" marL="0">
+              <a:buNone/>
+            </a:pPr>
+            <a:r>
+              <a:rPr lang="en-US" sz="750" dirty="0">
+                <a:solidFill>
+                  <a:srgbClr val="97A9AF"/>
+                </a:solidFill>
+                <a:latin typeface="Meiryo" pitchFamily="34" charset="0"/>
+                <a:ea typeface="Meiryo" pitchFamily="34" charset="-122"/>
+                <a:cs typeface="Meiryo" pitchFamily="34" charset="-120"/>
+              </a:rPr>
+              <a:t>鹿児島のパーキンソン病専門トレーニングスタジオ</a:t>
+            </a:r>
+            <a:endParaRPr lang="en-US" sz="750" dirty="0"/>
+          </a:p>
+        </p:txBody>
+      </p:sp>
+      <p:sp>
+        <p:nvSpPr>
+          <p:cNvPr id="4" name="Text 1"/>
           <p:cNvSpPr/>
           <p:nvPr/>
         </p:nvSpPr>
@@ -3605,7 +4036,7 @@
       </p:sp>
       <p:sp>
         <p:nvSpPr>
-          <p:cNvPr id="3" name="Text 1"/>
+          <p:cNvPr id="5" name="Text 2"/>
           <p:cNvSpPr/>
           <p:nvPr/>
         </p:nvSpPr>
@@ -3644,7 +4075,7 @@
       </p:sp>
       <p:sp>
         <p:nvSpPr>
-          <p:cNvPr id="4" name="Text 2"/>
+          <p:cNvPr id="6" name="Text 3"/>
           <p:cNvSpPr/>
           <p:nvPr/>
         </p:nvSpPr>
@@ -3683,7 +4114,7 @@
       </p:sp>
       <p:sp>
         <p:nvSpPr>
-          <p:cNvPr id="5" name="Shape 3"/>
+          <p:cNvPr id="7" name="Shape 4"/>
           <p:cNvSpPr/>
           <p:nvPr/>
         </p:nvSpPr>
@@ -3705,7 +4136,7 @@
       </p:sp>
       <p:sp>
         <p:nvSpPr>
-          <p:cNvPr id="6" name="Shape 4"/>
+          <p:cNvPr id="8" name="Shape 5"/>
           <p:cNvSpPr/>
           <p:nvPr/>
         </p:nvSpPr>
@@ -3725,7 +4156,7 @@
       </p:sp>
       <p:sp>
         <p:nvSpPr>
-          <p:cNvPr id="7" name="Text 5"/>
+          <p:cNvPr id="9" name="Text 6"/>
           <p:cNvSpPr/>
           <p:nvPr/>
         </p:nvSpPr>
@@ -3764,7 +4195,7 @@
       </p:sp>
       <p:sp>
         <p:nvSpPr>
-          <p:cNvPr id="8" name="Text 6"/>
+          <p:cNvPr id="10" name="Text 7"/>
           <p:cNvSpPr/>
           <p:nvPr/>
         </p:nvSpPr>
@@ -3803,7 +4234,7 @@
       </p:sp>
       <p:sp>
         <p:nvSpPr>
-          <p:cNvPr id="9" name="Text 7"/>
+          <p:cNvPr id="11" name="Text 8"/>
           <p:cNvSpPr/>
           <p:nvPr/>
         </p:nvSpPr>
@@ -3842,7 +4273,7 @@
       </p:sp>
       <p:sp>
         <p:nvSpPr>
-          <p:cNvPr id="10" name="Shape 8"/>
+          <p:cNvPr id="12" name="Shape 9"/>
           <p:cNvSpPr/>
           <p:nvPr/>
         </p:nvSpPr>
@@ -3864,7 +4295,7 @@
       </p:sp>
       <p:sp>
         <p:nvSpPr>
-          <p:cNvPr id="11" name="Shape 9"/>
+          <p:cNvPr id="13" name="Shape 10"/>
           <p:cNvSpPr/>
           <p:nvPr/>
         </p:nvSpPr>
@@ -3884,7 +4315,7 @@
       </p:sp>
       <p:sp>
         <p:nvSpPr>
-          <p:cNvPr id="12" name="Text 10"/>
+          <p:cNvPr id="14" name="Text 11"/>
           <p:cNvSpPr/>
           <p:nvPr/>
         </p:nvSpPr>
@@ -3923,7 +4354,7 @@
       </p:sp>
       <p:sp>
         <p:nvSpPr>
-          <p:cNvPr id="13" name="Text 11"/>
+          <p:cNvPr id="15" name="Text 12"/>
           <p:cNvSpPr/>
           <p:nvPr/>
         </p:nvSpPr>
@@ -3962,7 +4393,7 @@
       </p:sp>
       <p:sp>
         <p:nvSpPr>
-          <p:cNvPr id="14" name="Text 12"/>
+          <p:cNvPr id="16" name="Text 13"/>
           <p:cNvSpPr/>
           <p:nvPr/>
         </p:nvSpPr>
@@ -4001,7 +4432,7 @@
       </p:sp>
       <p:sp>
         <p:nvSpPr>
-          <p:cNvPr id="15" name="Shape 13"/>
+          <p:cNvPr id="17" name="Shape 14"/>
           <p:cNvSpPr/>
           <p:nvPr/>
         </p:nvSpPr>
@@ -4023,7 +4454,7 @@
       </p:sp>
       <p:sp>
         <p:nvSpPr>
-          <p:cNvPr id="16" name="Shape 14"/>
+          <p:cNvPr id="18" name="Shape 15"/>
           <p:cNvSpPr/>
           <p:nvPr/>
         </p:nvSpPr>
@@ -4043,7 +4474,7 @@
       </p:sp>
       <p:sp>
         <p:nvSpPr>
-          <p:cNvPr id="17" name="Text 15"/>
+          <p:cNvPr id="19" name="Text 16"/>
           <p:cNvSpPr/>
           <p:nvPr/>
         </p:nvSpPr>
@@ -4082,7 +4513,7 @@
       </p:sp>
       <p:sp>
         <p:nvSpPr>
-          <p:cNvPr id="18" name="Text 16"/>
+          <p:cNvPr id="20" name="Text 17"/>
           <p:cNvSpPr/>
           <p:nvPr/>
         </p:nvSpPr>
@@ -4121,7 +4552,7 @@
       </p:sp>
       <p:sp>
         <p:nvSpPr>
-          <p:cNvPr id="19" name="Text 17"/>
+          <p:cNvPr id="21" name="Text 18"/>
           <p:cNvSpPr/>
           <p:nvPr/>
         </p:nvSpPr>
@@ -4160,7 +4591,7 @@
       </p:sp>
       <p:sp>
         <p:nvSpPr>
-          <p:cNvPr id="20" name="Shape 18"/>
+          <p:cNvPr id="22" name="Shape 19"/>
           <p:cNvSpPr/>
           <p:nvPr/>
         </p:nvSpPr>
@@ -4182,7 +4613,7 @@
       </p:sp>
       <p:sp>
         <p:nvSpPr>
-          <p:cNvPr id="21" name="Text 19"/>
+          <p:cNvPr id="23" name="Text 20"/>
           <p:cNvSpPr/>
           <p:nvPr/>
         </p:nvSpPr>
@@ -4254,9 +4685,72 @@
           <a:chExt cx="0" cy="0"/>
         </a:xfrm>
       </p:grpSpPr>
-      <p:sp>
-        <p:nvSpPr>
-          <p:cNvPr id="2" name="Text 0"/>
+      <p:pic>
+        <p:nvPicPr>
+          <p:cNvPr id="2" name="Image 0" descr="/sessions/compassionate-sweet-heisenberg/mnt/dev-aspath-life-main/tools/assets/logo-deck.png">    </p:cNvPr>
+          <p:cNvPicPr>
+            <a:picLocks noChangeAspect="1"/>
+          </p:cNvPicPr>
+          <p:nvPr/>
+        </p:nvPicPr>
+        <p:blipFill>
+          <a:blip r:embed="rId1"/>
+          <a:stretch>
+            <a:fillRect/>
+          </a:stretch>
+        </p:blipFill>
+        <p:spPr>
+          <a:xfrm>
+            <a:off x="11458173" y="109728"/>
+            <a:ext cx="209571" cy="256032"/>
+          </a:xfrm>
+          <a:prstGeom prst="rect">
+            <a:avLst/>
+          </a:prstGeom>
+        </p:spPr>
+      </p:pic>
+      <p:sp>
+        <p:nvSpPr>
+          <p:cNvPr id="3" name="Text 0"/>
+          <p:cNvSpPr txBox="1"/>
+          <p:nvPr/>
+        </p:nvSpPr>
+        <p:spPr>
+          <a:xfrm>
+            <a:off x="8623533" y="128016"/>
+            <a:ext cx="2743200" cy="237744"/>
+          </a:xfrm>
+          <a:prstGeom prst="rect">
+            <a:avLst/>
+          </a:prstGeom>
+          <a:noFill/>
+          <a:ln/>
+        </p:spPr>
+        <p:txBody>
+          <a:bodyPr wrap="square" lIns="0" tIns="0" rIns="0" bIns="0" rtlCol="0" anchor="ctr"/>
+          <a:lstStyle/>
+          <a:p>
+            <a:pPr algn="r" indent="0" marL="0">
+              <a:buNone/>
+            </a:pPr>
+            <a:r>
+              <a:rPr lang="en-US" sz="750" dirty="0">
+                <a:solidFill>
+                  <a:srgbClr val="97A9AF"/>
+                </a:solidFill>
+                <a:latin typeface="Meiryo" pitchFamily="34" charset="0"/>
+                <a:ea typeface="Meiryo" pitchFamily="34" charset="-122"/>
+                <a:cs typeface="Meiryo" pitchFamily="34" charset="-120"/>
+              </a:rPr>
+              <a:t>鹿児島のパーキンソン病専門トレーニングスタジオ</a:t>
+            </a:r>
+            <a:endParaRPr lang="en-US" sz="750" dirty="0"/>
+          </a:p>
+        </p:txBody>
+      </p:sp>
+      <p:sp>
+        <p:nvSpPr>
+          <p:cNvPr id="4" name="Text 1"/>
           <p:cNvSpPr/>
           <p:nvPr/>
         </p:nvSpPr>
@@ -4295,7 +4789,7 @@
       </p:sp>
       <p:sp>
         <p:nvSpPr>
-          <p:cNvPr id="3" name="Text 1"/>
+          <p:cNvPr id="5" name="Text 2"/>
           <p:cNvSpPr/>
           <p:nvPr/>
         </p:nvSpPr>
@@ -4334,7 +4828,7 @@
       </p:sp>
       <p:sp>
         <p:nvSpPr>
-          <p:cNvPr id="4" name="Text 2"/>
+          <p:cNvPr id="6" name="Text 3"/>
           <p:cNvSpPr/>
           <p:nvPr/>
         </p:nvSpPr>
@@ -4373,7 +4867,7 @@
       </p:sp>
       <p:sp>
         <p:nvSpPr>
-          <p:cNvPr id="5" name="Shape 3"/>
+          <p:cNvPr id="7" name="Shape 4"/>
           <p:cNvSpPr/>
           <p:nvPr/>
         </p:nvSpPr>
@@ -4393,7 +4887,7 @@
       </p:sp>
       <p:sp>
         <p:nvSpPr>
-          <p:cNvPr id="6" name="Text 4"/>
+          <p:cNvPr id="8" name="Text 5"/>
           <p:cNvSpPr/>
           <p:nvPr/>
         </p:nvSpPr>
@@ -4432,7 +4926,7 @@
       </p:sp>
       <p:sp>
         <p:nvSpPr>
-          <p:cNvPr id="7" name="Text 5"/>
+          <p:cNvPr id="9" name="Text 6"/>
           <p:cNvSpPr/>
           <p:nvPr/>
         </p:nvSpPr>
@@ -4471,7 +4965,7 @@
       </p:sp>
       <p:sp>
         <p:nvSpPr>
-          <p:cNvPr id="8" name="Shape 6"/>
+          <p:cNvPr id="10" name="Shape 7"/>
           <p:cNvSpPr/>
           <p:nvPr/>
         </p:nvSpPr>
@@ -4491,7 +4985,7 @@
       </p:sp>
       <p:sp>
         <p:nvSpPr>
-          <p:cNvPr id="9" name="Text 7"/>
+          <p:cNvPr id="11" name="Text 8"/>
           <p:cNvSpPr/>
           <p:nvPr/>
         </p:nvSpPr>
@@ -4530,7 +5024,7 @@
       </p:sp>
       <p:sp>
         <p:nvSpPr>
-          <p:cNvPr id="10" name="Text 8"/>
+          <p:cNvPr id="12" name="Text 9"/>
           <p:cNvSpPr/>
           <p:nvPr/>
         </p:nvSpPr>
@@ -4569,7 +5063,7 @@
       </p:sp>
       <p:sp>
         <p:nvSpPr>
-          <p:cNvPr id="11" name="Shape 9"/>
+          <p:cNvPr id="13" name="Shape 10"/>
           <p:cNvSpPr/>
           <p:nvPr/>
         </p:nvSpPr>
@@ -4589,7 +5083,7 @@
       </p:sp>
       <p:sp>
         <p:nvSpPr>
-          <p:cNvPr id="12" name="Text 10"/>
+          <p:cNvPr id="14" name="Text 11"/>
           <p:cNvSpPr/>
           <p:nvPr/>
         </p:nvSpPr>
@@ -4628,7 +5122,7 @@
       </p:sp>
       <p:sp>
         <p:nvSpPr>
-          <p:cNvPr id="13" name="Text 11"/>
+          <p:cNvPr id="15" name="Text 12"/>
           <p:cNvSpPr/>
           <p:nvPr/>
         </p:nvSpPr>
@@ -4667,7 +5161,7 @@
       </p:sp>
       <p:sp>
         <p:nvSpPr>
-          <p:cNvPr id="14" name="Shape 12"/>
+          <p:cNvPr id="16" name="Shape 13"/>
           <p:cNvSpPr/>
           <p:nvPr/>
         </p:nvSpPr>
@@ -4687,7 +5181,7 @@
       </p:sp>
       <p:sp>
         <p:nvSpPr>
-          <p:cNvPr id="15" name="Text 13"/>
+          <p:cNvPr id="17" name="Text 14"/>
           <p:cNvSpPr/>
           <p:nvPr/>
         </p:nvSpPr>
@@ -4726,7 +5220,7 @@
       </p:sp>
       <p:sp>
         <p:nvSpPr>
-          <p:cNvPr id="16" name="Text 14"/>
+          <p:cNvPr id="18" name="Text 15"/>
           <p:cNvSpPr/>
           <p:nvPr/>
         </p:nvSpPr>
@@ -4765,7 +5259,7 @@
       </p:sp>
       <p:sp>
         <p:nvSpPr>
-          <p:cNvPr id="17" name="Shape 15"/>
+          <p:cNvPr id="19" name="Shape 16"/>
           <p:cNvSpPr/>
           <p:nvPr/>
         </p:nvSpPr>
@@ -4787,7 +5281,7 @@
       </p:sp>
       <p:sp>
         <p:nvSpPr>
-          <p:cNvPr id="18" name="Text 16"/>
+          <p:cNvPr id="20" name="Text 17"/>
           <p:cNvSpPr/>
           <p:nvPr/>
         </p:nvSpPr>
@@ -4879,9 +5373,72 @@
           <a:chExt cx="0" cy="0"/>
         </a:xfrm>
       </p:grpSpPr>
-      <p:sp>
-        <p:nvSpPr>
-          <p:cNvPr id="2" name="Text 0"/>
+      <p:pic>
+        <p:nvPicPr>
+          <p:cNvPr id="2" name="Image 0" descr="/sessions/compassionate-sweet-heisenberg/mnt/dev-aspath-life-main/tools/assets/logo-deck.png">    </p:cNvPr>
+          <p:cNvPicPr>
+            <a:picLocks noChangeAspect="1"/>
+          </p:cNvPicPr>
+          <p:nvPr/>
+        </p:nvPicPr>
+        <p:blipFill>
+          <a:blip r:embed="rId1"/>
+          <a:stretch>
+            <a:fillRect/>
+          </a:stretch>
+        </p:blipFill>
+        <p:spPr>
+          <a:xfrm>
+            <a:off x="11458173" y="109728"/>
+            <a:ext cx="209571" cy="256032"/>
+          </a:xfrm>
+          <a:prstGeom prst="rect">
+            <a:avLst/>
+          </a:prstGeom>
+        </p:spPr>
+      </p:pic>
+      <p:sp>
+        <p:nvSpPr>
+          <p:cNvPr id="3" name="Text 0"/>
+          <p:cNvSpPr txBox="1"/>
+          <p:nvPr/>
+        </p:nvSpPr>
+        <p:spPr>
+          <a:xfrm>
+            <a:off x="8623533" y="128016"/>
+            <a:ext cx="2743200" cy="237744"/>
+          </a:xfrm>
+          <a:prstGeom prst="rect">
+            <a:avLst/>
+          </a:prstGeom>
+          <a:noFill/>
+          <a:ln/>
+        </p:spPr>
+        <p:txBody>
+          <a:bodyPr wrap="square" lIns="0" tIns="0" rIns="0" bIns="0" rtlCol="0" anchor="ctr"/>
+          <a:lstStyle/>
+          <a:p>
+            <a:pPr algn="r" indent="0" marL="0">
+              <a:buNone/>
+            </a:pPr>
+            <a:r>
+              <a:rPr lang="en-US" sz="750" dirty="0">
+                <a:solidFill>
+                  <a:srgbClr val="97A9AF"/>
+                </a:solidFill>
+                <a:latin typeface="Meiryo" pitchFamily="34" charset="0"/>
+                <a:ea typeface="Meiryo" pitchFamily="34" charset="-122"/>
+                <a:cs typeface="Meiryo" pitchFamily="34" charset="-120"/>
+              </a:rPr>
+              <a:t>鹿児島のパーキンソン病専門トレーニングスタジオ</a:t>
+            </a:r>
+            <a:endParaRPr lang="en-US" sz="750" dirty="0"/>
+          </a:p>
+        </p:txBody>
+      </p:sp>
+      <p:sp>
+        <p:nvSpPr>
+          <p:cNvPr id="4" name="Text 1"/>
           <p:cNvSpPr/>
           <p:nvPr/>
         </p:nvSpPr>
@@ -4920,7 +5477,7 @@
       </p:sp>
       <p:sp>
         <p:nvSpPr>
-          <p:cNvPr id="3" name="Text 1"/>
+          <p:cNvPr id="5" name="Text 2"/>
           <p:cNvSpPr/>
           <p:nvPr/>
         </p:nvSpPr>
@@ -4959,7 +5516,7 @@
       </p:sp>
       <p:sp>
         <p:nvSpPr>
-          <p:cNvPr id="4" name="Text 2"/>
+          <p:cNvPr id="6" name="Text 3"/>
           <p:cNvSpPr/>
           <p:nvPr/>
         </p:nvSpPr>
@@ -4998,7 +5555,7 @@
       </p:sp>
       <p:sp>
         <p:nvSpPr>
-          <p:cNvPr id="5" name="Shape 3"/>
+          <p:cNvPr id="7" name="Shape 4"/>
           <p:cNvSpPr/>
           <p:nvPr/>
         </p:nvSpPr>
@@ -5020,7 +5577,7 @@
       </p:sp>
       <p:sp>
         <p:nvSpPr>
-          <p:cNvPr id="6" name="Shape 4"/>
+          <p:cNvPr id="8" name="Shape 5"/>
           <p:cNvSpPr/>
           <p:nvPr/>
         </p:nvSpPr>
@@ -5040,7 +5597,7 @@
       </p:sp>
       <p:sp>
         <p:nvSpPr>
-          <p:cNvPr id="7" name="Text 5"/>
+          <p:cNvPr id="9" name="Text 6"/>
           <p:cNvSpPr/>
           <p:nvPr/>
         </p:nvSpPr>
@@ -5079,7 +5636,7 @@
       </p:sp>
       <p:sp>
         <p:nvSpPr>
-          <p:cNvPr id="8" name="Text 6"/>
+          <p:cNvPr id="10" name="Text 7"/>
           <p:cNvSpPr/>
           <p:nvPr/>
         </p:nvSpPr>
@@ -5118,7 +5675,7 @@
       </p:sp>
       <p:sp>
         <p:nvSpPr>
-          <p:cNvPr id="9" name="Text 7"/>
+          <p:cNvPr id="11" name="Text 8"/>
           <p:cNvSpPr/>
           <p:nvPr/>
         </p:nvSpPr>
@@ -5157,7 +5714,7 @@
       </p:sp>
       <p:sp>
         <p:nvSpPr>
-          <p:cNvPr id="10" name="Shape 8"/>
+          <p:cNvPr id="12" name="Shape 9"/>
           <p:cNvSpPr/>
           <p:nvPr/>
         </p:nvSpPr>
@@ -5179,7 +5736,7 @@
       </p:sp>
       <p:sp>
         <p:nvSpPr>
-          <p:cNvPr id="11" name="Shape 9"/>
+          <p:cNvPr id="13" name="Shape 10"/>
           <p:cNvSpPr/>
           <p:nvPr/>
         </p:nvSpPr>
@@ -5199,7 +5756,7 @@
       </p:sp>
       <p:sp>
         <p:nvSpPr>
-          <p:cNvPr id="12" name="Text 10"/>
+          <p:cNvPr id="14" name="Text 11"/>
           <p:cNvSpPr/>
           <p:nvPr/>
         </p:nvSpPr>
@@ -5238,7 +5795,7 @@
       </p:sp>
       <p:sp>
         <p:nvSpPr>
-          <p:cNvPr id="13" name="Text 11"/>
+          <p:cNvPr id="15" name="Text 12"/>
           <p:cNvSpPr/>
           <p:nvPr/>
         </p:nvSpPr>
@@ -5277,7 +5834,7 @@
       </p:sp>
       <p:sp>
         <p:nvSpPr>
-          <p:cNvPr id="14" name="Text 12"/>
+          <p:cNvPr id="16" name="Text 13"/>
           <p:cNvSpPr/>
           <p:nvPr/>
         </p:nvSpPr>
@@ -5316,7 +5873,7 @@
       </p:sp>
       <p:sp>
         <p:nvSpPr>
-          <p:cNvPr id="15" name="Shape 13"/>
+          <p:cNvPr id="17" name="Shape 14"/>
           <p:cNvSpPr/>
           <p:nvPr/>
         </p:nvSpPr>
@@ -5338,7 +5895,7 @@
       </p:sp>
       <p:sp>
         <p:nvSpPr>
-          <p:cNvPr id="16" name="Shape 14"/>
+          <p:cNvPr id="18" name="Shape 15"/>
           <p:cNvSpPr/>
           <p:nvPr/>
         </p:nvSpPr>
@@ -5358,7 +5915,7 @@
       </p:sp>
       <p:sp>
         <p:nvSpPr>
-          <p:cNvPr id="17" name="Text 15"/>
+          <p:cNvPr id="19" name="Text 16"/>
           <p:cNvSpPr/>
           <p:nvPr/>
         </p:nvSpPr>
@@ -5397,7 +5954,7 @@
       </p:sp>
       <p:sp>
         <p:nvSpPr>
-          <p:cNvPr id="18" name="Text 16"/>
+          <p:cNvPr id="20" name="Text 17"/>
           <p:cNvSpPr/>
           <p:nvPr/>
         </p:nvSpPr>
@@ -5436,7 +5993,7 @@
       </p:sp>
       <p:sp>
         <p:nvSpPr>
-          <p:cNvPr id="19" name="Text 17"/>
+          <p:cNvPr id="21" name="Text 18"/>
           <p:cNvSpPr/>
           <p:nvPr/>
         </p:nvSpPr>
@@ -5475,7 +6032,7 @@
       </p:sp>
       <p:sp>
         <p:nvSpPr>
-          <p:cNvPr id="20" name="Shape 18"/>
+          <p:cNvPr id="22" name="Shape 19"/>
           <p:cNvSpPr/>
           <p:nvPr/>
         </p:nvSpPr>
@@ -5497,7 +6054,7 @@
       </p:sp>
       <p:sp>
         <p:nvSpPr>
-          <p:cNvPr id="21" name="Shape 19"/>
+          <p:cNvPr id="23" name="Shape 20"/>
           <p:cNvSpPr/>
           <p:nvPr/>
         </p:nvSpPr>
@@ -5517,7 +6074,7 @@
       </p:sp>
       <p:sp>
         <p:nvSpPr>
-          <p:cNvPr id="22" name="Text 20"/>
+          <p:cNvPr id="24" name="Text 21"/>
           <p:cNvSpPr/>
           <p:nvPr/>
         </p:nvSpPr>
@@ -5556,7 +6113,7 @@
       </p:sp>
       <p:sp>
         <p:nvSpPr>
-          <p:cNvPr id="23" name="Text 21"/>
+          <p:cNvPr id="25" name="Text 22"/>
           <p:cNvSpPr/>
           <p:nvPr/>
         </p:nvSpPr>
@@ -5595,7 +6152,7 @@
       </p:sp>
       <p:sp>
         <p:nvSpPr>
-          <p:cNvPr id="24" name="Text 22"/>
+          <p:cNvPr id="26" name="Text 23"/>
           <p:cNvSpPr/>
           <p:nvPr/>
         </p:nvSpPr>
@@ -5664,9 +6221,72 @@
           <a:chExt cx="0" cy="0"/>
         </a:xfrm>
       </p:grpSpPr>
-      <p:sp>
-        <p:nvSpPr>
-          <p:cNvPr id="2" name="Text 0"/>
+      <p:pic>
+        <p:nvPicPr>
+          <p:cNvPr id="2" name="Image 0" descr="/sessions/compassionate-sweet-heisenberg/mnt/dev-aspath-life-main/tools/assets/logo-deck.png">    </p:cNvPr>
+          <p:cNvPicPr>
+            <a:picLocks noChangeAspect="1"/>
+          </p:cNvPicPr>
+          <p:nvPr/>
+        </p:nvPicPr>
+        <p:blipFill>
+          <a:blip r:embed="rId1"/>
+          <a:stretch>
+            <a:fillRect/>
+          </a:stretch>
+        </p:blipFill>
+        <p:spPr>
+          <a:xfrm>
+            <a:off x="11458173" y="109728"/>
+            <a:ext cx="209571" cy="256032"/>
+          </a:xfrm>
+          <a:prstGeom prst="rect">
+            <a:avLst/>
+          </a:prstGeom>
+        </p:spPr>
+      </p:pic>
+      <p:sp>
+        <p:nvSpPr>
+          <p:cNvPr id="3" name="Text 0"/>
+          <p:cNvSpPr txBox="1"/>
+          <p:nvPr/>
+        </p:nvSpPr>
+        <p:spPr>
+          <a:xfrm>
+            <a:off x="8623533" y="128016"/>
+            <a:ext cx="2743200" cy="237744"/>
+          </a:xfrm>
+          <a:prstGeom prst="rect">
+            <a:avLst/>
+          </a:prstGeom>
+          <a:noFill/>
+          <a:ln/>
+        </p:spPr>
+        <p:txBody>
+          <a:bodyPr wrap="square" lIns="0" tIns="0" rIns="0" bIns="0" rtlCol="0" anchor="ctr"/>
+          <a:lstStyle/>
+          <a:p>
+            <a:pPr algn="r" indent="0" marL="0">
+              <a:buNone/>
+            </a:pPr>
+            <a:r>
+              <a:rPr lang="en-US" sz="750" dirty="0">
+                <a:solidFill>
+                  <a:srgbClr val="97A9AF"/>
+                </a:solidFill>
+                <a:latin typeface="Meiryo" pitchFamily="34" charset="0"/>
+                <a:ea typeface="Meiryo" pitchFamily="34" charset="-122"/>
+                <a:cs typeface="Meiryo" pitchFamily="34" charset="-120"/>
+              </a:rPr>
+              <a:t>鹿児島のパーキンソン病専門トレーニングスタジオ</a:t>
+            </a:r>
+            <a:endParaRPr lang="en-US" sz="750" dirty="0"/>
+          </a:p>
+        </p:txBody>
+      </p:sp>
+      <p:sp>
+        <p:nvSpPr>
+          <p:cNvPr id="4" name="Text 1"/>
           <p:cNvSpPr/>
           <p:nvPr/>
         </p:nvSpPr>
@@ -5705,7 +6325,7 @@
       </p:sp>
       <p:sp>
         <p:nvSpPr>
-          <p:cNvPr id="3" name="Text 1"/>
+          <p:cNvPr id="5" name="Text 2"/>
           <p:cNvSpPr/>
           <p:nvPr/>
         </p:nvSpPr>
@@ -5744,7 +6364,7 @@
       </p:sp>
       <p:sp>
         <p:nvSpPr>
-          <p:cNvPr id="4" name="Text 2"/>
+          <p:cNvPr id="6" name="Text 3"/>
           <p:cNvSpPr/>
           <p:nvPr/>
         </p:nvSpPr>
@@ -5783,7 +6403,7 @@
       </p:sp>
       <p:sp>
         <p:nvSpPr>
-          <p:cNvPr id="5" name="Shape 3"/>
+          <p:cNvPr id="7" name="Shape 4"/>
           <p:cNvSpPr/>
           <p:nvPr/>
         </p:nvSpPr>
@@ -5803,7 +6423,7 @@
       </p:sp>
       <p:sp>
         <p:nvSpPr>
-          <p:cNvPr id="6" name="Text 4"/>
+          <p:cNvPr id="8" name="Text 5"/>
           <p:cNvSpPr/>
           <p:nvPr/>
         </p:nvSpPr>
@@ -5842,7 +6462,7 @@
       </p:sp>
       <p:sp>
         <p:nvSpPr>
-          <p:cNvPr id="7" name="Text 5"/>
+          <p:cNvPr id="9" name="Text 6"/>
           <p:cNvSpPr/>
           <p:nvPr/>
         </p:nvSpPr>
@@ -5881,7 +6501,7 @@
       </p:sp>
       <p:sp>
         <p:nvSpPr>
-          <p:cNvPr id="8" name="Shape 6"/>
+          <p:cNvPr id="10" name="Shape 7"/>
           <p:cNvSpPr/>
           <p:nvPr/>
         </p:nvSpPr>
@@ -5901,7 +6521,7 @@
       </p:sp>
       <p:sp>
         <p:nvSpPr>
-          <p:cNvPr id="9" name="Text 7"/>
+          <p:cNvPr id="11" name="Text 8"/>
           <p:cNvSpPr/>
           <p:nvPr/>
         </p:nvSpPr>
@@ -5940,7 +6560,7 @@
       </p:sp>
       <p:sp>
         <p:nvSpPr>
-          <p:cNvPr id="10" name="Text 8"/>
+          <p:cNvPr id="12" name="Text 9"/>
           <p:cNvSpPr/>
           <p:nvPr/>
         </p:nvSpPr>
@@ -5979,7 +6599,7 @@
       </p:sp>
       <p:sp>
         <p:nvSpPr>
-          <p:cNvPr id="11" name="Shape 9"/>
+          <p:cNvPr id="13" name="Shape 10"/>
           <p:cNvSpPr/>
           <p:nvPr/>
         </p:nvSpPr>
@@ -5999,7 +6619,7 @@
       </p:sp>
       <p:sp>
         <p:nvSpPr>
-          <p:cNvPr id="12" name="Text 10"/>
+          <p:cNvPr id="14" name="Text 11"/>
           <p:cNvSpPr/>
           <p:nvPr/>
         </p:nvSpPr>
@@ -6038,7 +6658,7 @@
       </p:sp>
       <p:sp>
         <p:nvSpPr>
-          <p:cNvPr id="13" name="Text 11"/>
+          <p:cNvPr id="15" name="Text 12"/>
           <p:cNvSpPr/>
           <p:nvPr/>
         </p:nvSpPr>
@@ -6077,7 +6697,7 @@
       </p:sp>
       <p:sp>
         <p:nvSpPr>
-          <p:cNvPr id="14" name="Shape 12"/>
+          <p:cNvPr id="16" name="Shape 13"/>
           <p:cNvSpPr/>
           <p:nvPr/>
         </p:nvSpPr>
@@ -6099,7 +6719,7 @@
       </p:sp>
       <p:sp>
         <p:nvSpPr>
-          <p:cNvPr id="15" name="Text 13"/>
+          <p:cNvPr id="17" name="Text 14"/>
           <p:cNvSpPr/>
           <p:nvPr/>
         </p:nvSpPr>
@@ -6138,7 +6758,7 @@
       </p:sp>
       <p:sp>
         <p:nvSpPr>
-          <p:cNvPr id="16" name="Text 14"/>
+          <p:cNvPr id="18" name="Text 15"/>
           <p:cNvSpPr/>
           <p:nvPr/>
         </p:nvSpPr>
@@ -6230,9 +6850,72 @@
           <a:chExt cx="0" cy="0"/>
         </a:xfrm>
       </p:grpSpPr>
-      <p:sp>
-        <p:nvSpPr>
-          <p:cNvPr id="2" name="Text 0"/>
+      <p:pic>
+        <p:nvPicPr>
+          <p:cNvPr id="2" name="Image 0" descr="/sessions/compassionate-sweet-heisenberg/mnt/dev-aspath-life-main/tools/assets/logo-deck.png">    </p:cNvPr>
+          <p:cNvPicPr>
+            <a:picLocks noChangeAspect="1"/>
+          </p:cNvPicPr>
+          <p:nvPr/>
+        </p:nvPicPr>
+        <p:blipFill>
+          <a:blip r:embed="rId1"/>
+          <a:stretch>
+            <a:fillRect/>
+          </a:stretch>
+        </p:blipFill>
+        <p:spPr>
+          <a:xfrm>
+            <a:off x="11458173" y="109728"/>
+            <a:ext cx="209571" cy="256032"/>
+          </a:xfrm>
+          <a:prstGeom prst="rect">
+            <a:avLst/>
+          </a:prstGeom>
+        </p:spPr>
+      </p:pic>
+      <p:sp>
+        <p:nvSpPr>
+          <p:cNvPr id="3" name="Text 0"/>
+          <p:cNvSpPr txBox="1"/>
+          <p:nvPr/>
+        </p:nvSpPr>
+        <p:spPr>
+          <a:xfrm>
+            <a:off x="8623533" y="128016"/>
+            <a:ext cx="2743200" cy="237744"/>
+          </a:xfrm>
+          <a:prstGeom prst="rect">
+            <a:avLst/>
+          </a:prstGeom>
+          <a:noFill/>
+          <a:ln/>
+        </p:spPr>
+        <p:txBody>
+          <a:bodyPr wrap="square" lIns="0" tIns="0" rIns="0" bIns="0" rtlCol="0" anchor="ctr"/>
+          <a:lstStyle/>
+          <a:p>
+            <a:pPr algn="r" indent="0" marL="0">
+              <a:buNone/>
+            </a:pPr>
+            <a:r>
+              <a:rPr lang="en-US" sz="750" dirty="0">
+                <a:solidFill>
+                  <a:srgbClr val="97A9AF"/>
+                </a:solidFill>
+                <a:latin typeface="Meiryo" pitchFamily="34" charset="0"/>
+                <a:ea typeface="Meiryo" pitchFamily="34" charset="-122"/>
+                <a:cs typeface="Meiryo" pitchFamily="34" charset="-120"/>
+              </a:rPr>
+              <a:t>鹿児島のパーキンソン病専門トレーニングスタジオ</a:t>
+            </a:r>
+            <a:endParaRPr lang="en-US" sz="750" dirty="0"/>
+          </a:p>
+        </p:txBody>
+      </p:sp>
+      <p:sp>
+        <p:nvSpPr>
+          <p:cNvPr id="4" name="Text 1"/>
           <p:cNvSpPr/>
           <p:nvPr/>
         </p:nvSpPr>
@@ -6271,7 +6954,7 @@
       </p:sp>
       <p:sp>
         <p:nvSpPr>
-          <p:cNvPr id="3" name="Text 1"/>
+          <p:cNvPr id="5" name="Text 2"/>
           <p:cNvSpPr/>
           <p:nvPr/>
         </p:nvSpPr>
@@ -6310,7 +6993,7 @@
       </p:sp>
       <p:sp>
         <p:nvSpPr>
-          <p:cNvPr id="4" name="Text 2"/>
+          <p:cNvPr id="6" name="Text 3"/>
           <p:cNvSpPr/>
           <p:nvPr/>
         </p:nvSpPr>
@@ -6349,7 +7032,7 @@
       </p:sp>
       <p:sp>
         <p:nvSpPr>
-          <p:cNvPr id="5" name="Shape 3"/>
+          <p:cNvPr id="7" name="Shape 4"/>
           <p:cNvSpPr/>
           <p:nvPr/>
         </p:nvSpPr>
@@ -6371,7 +7054,7 @@
       </p:sp>
       <p:sp>
         <p:nvSpPr>
-          <p:cNvPr id="6" name="Text 4"/>
+          <p:cNvPr id="8" name="Text 5"/>
           <p:cNvSpPr/>
           <p:nvPr/>
         </p:nvSpPr>
@@ -6410,7 +7093,7 @@
       </p:sp>
       <p:sp>
         <p:nvSpPr>
-          <p:cNvPr id="7" name="Text 5"/>
+          <p:cNvPr id="9" name="Text 6"/>
           <p:cNvSpPr/>
           <p:nvPr/>
         </p:nvSpPr>
@@ -6449,7 +7132,7 @@
       </p:sp>
       <p:sp>
         <p:nvSpPr>
-          <p:cNvPr id="8" name="Shape 6"/>
+          <p:cNvPr id="10" name="Shape 7"/>
           <p:cNvSpPr/>
           <p:nvPr/>
         </p:nvSpPr>
@@ -6471,7 +7154,7 @@
       </p:sp>
       <p:sp>
         <p:nvSpPr>
-          <p:cNvPr id="9" name="Text 7"/>
+          <p:cNvPr id="11" name="Text 8"/>
           <p:cNvSpPr/>
           <p:nvPr/>
         </p:nvSpPr>
@@ -6510,7 +7193,7 @@
       </p:sp>
       <p:sp>
         <p:nvSpPr>
-          <p:cNvPr id="10" name="Text 8"/>
+          <p:cNvPr id="12" name="Text 9"/>
           <p:cNvSpPr/>
           <p:nvPr/>
         </p:nvSpPr>
@@ -6549,7 +7232,7 @@
       </p:sp>
       <p:sp>
         <p:nvSpPr>
-          <p:cNvPr id="11" name="Shape 9"/>
+          <p:cNvPr id="13" name="Shape 10"/>
           <p:cNvSpPr/>
           <p:nvPr/>
         </p:nvSpPr>
@@ -6571,7 +7254,7 @@
       </p:sp>
       <p:sp>
         <p:nvSpPr>
-          <p:cNvPr id="12" name="Text 10"/>
+          <p:cNvPr id="14" name="Text 11"/>
           <p:cNvSpPr/>
           <p:nvPr/>
         </p:nvSpPr>
@@ -6610,7 +7293,7 @@
       </p:sp>
       <p:sp>
         <p:nvSpPr>
-          <p:cNvPr id="13" name="Text 11"/>
+          <p:cNvPr id="15" name="Text 12"/>
           <p:cNvSpPr/>
           <p:nvPr/>
         </p:nvSpPr>
@@ -6649,7 +7332,7 @@
       </p:sp>
       <p:sp>
         <p:nvSpPr>
-          <p:cNvPr id="14" name="Shape 12"/>
+          <p:cNvPr id="16" name="Shape 13"/>
           <p:cNvSpPr/>
           <p:nvPr/>
         </p:nvSpPr>
@@ -6671,7 +7354,7 @@
       </p:sp>
       <p:sp>
         <p:nvSpPr>
-          <p:cNvPr id="15" name="Text 13"/>
+          <p:cNvPr id="17" name="Text 14"/>
           <p:cNvSpPr/>
           <p:nvPr/>
         </p:nvSpPr>
@@ -6743,9 +7426,72 @@
           <a:chExt cx="0" cy="0"/>
         </a:xfrm>
       </p:grpSpPr>
-      <p:sp>
-        <p:nvSpPr>
-          <p:cNvPr id="2" name="Text 0"/>
+      <p:pic>
+        <p:nvPicPr>
+          <p:cNvPr id="2" name="Image 0" descr="/sessions/compassionate-sweet-heisenberg/mnt/dev-aspath-life-main/tools/assets/logo-deck-white.png">    </p:cNvPr>
+          <p:cNvPicPr>
+            <a:picLocks noChangeAspect="1"/>
+          </p:cNvPicPr>
+          <p:nvPr/>
+        </p:nvPicPr>
+        <p:blipFill>
+          <a:blip r:embed="rId1"/>
+          <a:stretch>
+            <a:fillRect/>
+          </a:stretch>
+        </p:blipFill>
+        <p:spPr>
+          <a:xfrm>
+            <a:off x="11458173" y="109728"/>
+            <a:ext cx="209571" cy="256032"/>
+          </a:xfrm>
+          <a:prstGeom prst="rect">
+            <a:avLst/>
+          </a:prstGeom>
+        </p:spPr>
+      </p:pic>
+      <p:sp>
+        <p:nvSpPr>
+          <p:cNvPr id="3" name="Text 0"/>
+          <p:cNvSpPr txBox="1"/>
+          <p:nvPr/>
+        </p:nvSpPr>
+        <p:spPr>
+          <a:xfrm>
+            <a:off x="8623533" y="128016"/>
+            <a:ext cx="2743200" cy="237744"/>
+          </a:xfrm>
+          <a:prstGeom prst="rect">
+            <a:avLst/>
+          </a:prstGeom>
+          <a:noFill/>
+          <a:ln/>
+        </p:spPr>
+        <p:txBody>
+          <a:bodyPr wrap="square" lIns="0" tIns="0" rIns="0" bIns="0" rtlCol="0" anchor="ctr"/>
+          <a:lstStyle/>
+          <a:p>
+            <a:pPr algn="r" indent="0" marL="0">
+              <a:buNone/>
+            </a:pPr>
+            <a:r>
+              <a:rPr lang="en-US" sz="750" dirty="0">
+                <a:solidFill>
+                  <a:srgbClr val="9FBAC1"/>
+                </a:solidFill>
+                <a:latin typeface="Meiryo" pitchFamily="34" charset="0"/>
+                <a:ea typeface="Meiryo" pitchFamily="34" charset="-122"/>
+                <a:cs typeface="Meiryo" pitchFamily="34" charset="-120"/>
+              </a:rPr>
+              <a:t>鹿児島のパーキンソン病専門トレーニングスタジオ</a:t>
+            </a:r>
+            <a:endParaRPr lang="en-US" sz="750" dirty="0"/>
+          </a:p>
+        </p:txBody>
+      </p:sp>
+      <p:sp>
+        <p:nvSpPr>
+          <p:cNvPr id="4" name="Text 1"/>
           <p:cNvSpPr/>
           <p:nvPr/>
         </p:nvSpPr>
@@ -6784,7 +7530,7 @@
       </p:sp>
       <p:sp>
         <p:nvSpPr>
-          <p:cNvPr id="3" name="Text 1"/>
+          <p:cNvPr id="5" name="Text 2"/>
           <p:cNvSpPr/>
           <p:nvPr/>
         </p:nvSpPr>
@@ -6823,7 +7569,7 @@
       </p:sp>
       <p:sp>
         <p:nvSpPr>
-          <p:cNvPr id="4" name="Text 2"/>
+          <p:cNvPr id="6" name="Text 3"/>
           <p:cNvSpPr/>
           <p:nvPr/>
         </p:nvSpPr>
@@ -6862,7 +7608,7 @@
       </p:sp>
       <p:sp>
         <p:nvSpPr>
-          <p:cNvPr id="5" name="Shape 3"/>
+          <p:cNvPr id="7" name="Shape 4"/>
           <p:cNvSpPr/>
           <p:nvPr/>
         </p:nvSpPr>
@@ -6884,7 +7630,7 @@
       </p:sp>
       <p:sp>
         <p:nvSpPr>
-          <p:cNvPr id="6" name="Text 4"/>
+          <p:cNvPr id="8" name="Text 5"/>
           <p:cNvSpPr/>
           <p:nvPr/>
         </p:nvSpPr>
@@ -6946,7 +7692,7 @@
       </p:sp>
       <p:sp>
         <p:nvSpPr>
-          <p:cNvPr id="7" name="Text 5"/>
+          <p:cNvPr id="9" name="Text 6"/>
           <p:cNvSpPr/>
           <p:nvPr/>
         </p:nvSpPr>
@@ -6985,7 +7731,7 @@
       </p:sp>
       <p:sp>
         <p:nvSpPr>
-          <p:cNvPr id="8" name="Text 6"/>
+          <p:cNvPr id="10" name="Text 7"/>
           <p:cNvSpPr/>
           <p:nvPr/>
         </p:nvSpPr>
